--- a/media/resources/files/Onduktar_Boluu_1denAz_XO.pptx
+++ b/media/resources/files/Onduktar_Boluu_1denAz_XO.pptx
@@ -11298,7 +11298,7 @@
                 <a:ea typeface="+mn-ea"/>
                 <a:cs typeface="+mn-cs"/>
               </a:rPr>
-              <a:t>Турдуу пикирлер учун ыраазычылык билдиребиз.</a:t>
+              <a:t>Түрдүү пикирлер үчүн ыраазычылык билдиребиз.</a:t>
             </a:r>
           </a:p>
           <a:p>

--- a/media/resources/files/Onduktar_Boluu_1denAz_XO.pptx
+++ b/media/resources/files/Onduktar_Boluu_1denAz_XO.pptx
@@ -6748,7 +6748,7 @@
                 <a:ea typeface="+mn-ea"/>
                 <a:cs typeface="Arial" panose="020B0604020202020204" pitchFamily="34" charset="0"/>
               </a:rPr>
-              <a:t>Мугалим үчүн жооп баракчасы жана таратма материалдар камтылган.</a:t>
+              <a:t>Мугалим үчүн жооп барагы жана таратма материалдар бар.</a:t>
             </a:r>
           </a:p>
           <a:p>
@@ -6817,7 +6817,7 @@
                 <a:ea typeface="+mn-ea"/>
                 <a:cs typeface="Arial" panose="020B0604020202020204" pitchFamily="34" charset="0"/>
               </a:rPr>
-              <a:t>Кайсы команда туура жооп бергенине жараша '</a:t>
+              <a:t>Туура жооп берген командага жараша «</a:t>
             </a:r>
             <a:r>
               <a:rPr kumimoji="0" lang="en-GB" sz="2000" b="0" i="0" u="sng" strike="noStrike" kern="1200" cap="none" spc="0" normalizeH="0" baseline="0" noProof="0" dirty="0">
@@ -6834,7 +6834,7 @@
                 <a:ea typeface="+mn-ea"/>
                 <a:cs typeface="Arial" panose="020B0604020202020204" pitchFamily="34" charset="0"/>
               </a:rPr>
-              <a:t>X' </a:t>
+              <a:t>X» </a:t>
             </a:r>
             <a:r>
               <a:rPr kumimoji="0" lang="ru-RU" sz="2000" b="0" i="0" u="sng" strike="noStrike" kern="1200" cap="none" spc="0" normalizeH="0" baseline="0" noProof="0" dirty="0">
@@ -6851,7 +6851,7 @@
                 <a:ea typeface="+mn-ea"/>
                 <a:cs typeface="Arial" panose="020B0604020202020204" pitchFamily="34" charset="0"/>
               </a:rPr>
-              <a:t>же '</a:t>
+              <a:t>же «</a:t>
             </a:r>
             <a:r>
               <a:rPr kumimoji="0" lang="en-GB" sz="2000" b="0" i="0" u="sng" strike="noStrike" kern="1200" cap="none" spc="0" normalizeH="0" baseline="0" noProof="0" dirty="0">
@@ -6868,7 +6868,7 @@
                 <a:ea typeface="+mn-ea"/>
                 <a:cs typeface="Arial" panose="020B0604020202020204" pitchFamily="34" charset="0"/>
               </a:rPr>
-              <a:t>O' </a:t>
+              <a:t>O» </a:t>
             </a:r>
             <a:r>
               <a:rPr kumimoji="0" lang="ru-RU" sz="2000" b="0" i="0" u="sng" strike="noStrike" kern="1200" cap="none" spc="0" normalizeH="0" baseline="0" noProof="0" dirty="0">
@@ -6885,7 +6885,7 @@
                 <a:ea typeface="+mn-ea"/>
                 <a:cs typeface="Arial" panose="020B0604020202020204" pitchFamily="34" charset="0"/>
               </a:rPr>
-              <a:t>баскычын басыңыз/тийип коюңуз</a:t>
+              <a:t>баскычын басыңыз</a:t>
             </a:r>
             <a:r>
               <a:rPr kumimoji="0" lang="en-GB" sz="2000" b="0" i="0" u="none" strike="noStrike" kern="1200" cap="none" spc="0" normalizeH="0" baseline="0" noProof="0" dirty="0">
@@ -7497,7 +7497,7 @@
             <a:pPr algn="ctr"/>
             <a:r>
               <a:rPr lang="en-GB" sz="4400" dirty="0"/>
-              <a:t>16 ÷ 0.4</a:t>
+              <a:t>16 ÷ 0,4</a:t>
             </a:r>
           </a:p>
         </p:txBody>
@@ -7533,7 +7533,7 @@
             <a:pPr algn="ctr"/>
             <a:r>
               <a:rPr lang="en-GB" sz="4400" dirty="0"/>
-              <a:t>12 ÷ 0.5</a:t>
+              <a:t>12 ÷ 0,5</a:t>
             </a:r>
           </a:p>
         </p:txBody>
@@ -7569,7 +7569,7 @@
             <a:pPr algn="ctr"/>
             <a:r>
               <a:rPr lang="en-GB" sz="4400" dirty="0"/>
-              <a:t>8 ÷ 0.2</a:t>
+              <a:t>8 ÷ 0,2</a:t>
             </a:r>
           </a:p>
         </p:txBody>
@@ -7605,7 +7605,7 @@
             <a:pPr algn="ctr"/>
             <a:r>
               <a:rPr lang="en-GB" sz="4400" dirty="0"/>
-              <a:t>30 ÷ 0.6</a:t>
+              <a:t>30 ÷ 0,6</a:t>
             </a:r>
           </a:p>
         </p:txBody>
@@ -7641,7 +7641,7 @@
             <a:pPr algn="ctr"/>
             <a:r>
               <a:rPr lang="en-GB" sz="4400" dirty="0"/>
-              <a:t>9 ÷ 0.3</a:t>
+              <a:t>9 ÷ 0,3</a:t>
             </a:r>
           </a:p>
         </p:txBody>
@@ -7677,7 +7677,7 @@
             <a:pPr algn="ctr"/>
             <a:r>
               <a:rPr lang="en-GB" sz="4400" dirty="0"/>
-              <a:t>70 ÷ 0.7</a:t>
+              <a:t>70 ÷ 0,7</a:t>
             </a:r>
           </a:p>
         </p:txBody>
@@ -7713,7 +7713,7 @@
             <a:pPr algn="ctr"/>
             <a:r>
               <a:rPr lang="en-GB" sz="4400" dirty="0"/>
-              <a:t>16 ÷ 0.1</a:t>
+              <a:t>16 ÷ 0,1</a:t>
             </a:r>
           </a:p>
         </p:txBody>
@@ -7749,7 +7749,7 @@
             <a:pPr algn="ctr"/>
             <a:r>
               <a:rPr lang="en-GB" sz="4400" dirty="0"/>
-              <a:t>11 ÷ 0.2</a:t>
+              <a:t>11 ÷ 0,2</a:t>
             </a:r>
           </a:p>
         </p:txBody>
@@ -7785,7 +7785,7 @@
             <a:pPr algn="ctr"/>
             <a:r>
               <a:rPr lang="en-GB" sz="4400" dirty="0"/>
-              <a:t>7 ÷ 0.5</a:t>
+              <a:t>7 ÷ 0,5</a:t>
             </a:r>
           </a:p>
         </p:txBody>
